--- a/Reporte 070726.pptx
+++ b/Reporte 070726.pptx
@@ -6543,10 +6543,10 @@
       </p:sp>
       <p:pic>
         <p:nvPicPr>
-          <p:cNvPr id="5" name="Imagen 4">
+          <p:cNvPr id="4" name="Imagen 3">
             <a:extLst>
               <a:ext uri="{FF2B5EF4-FFF2-40B4-BE49-F238E27FC236}">
-                <a16:creationId xmlns:a16="http://schemas.microsoft.com/office/drawing/2014/main" id="{48003067-6DE6-0282-3648-52DEDE3848AF}"/>
+                <a16:creationId xmlns:a16="http://schemas.microsoft.com/office/drawing/2014/main" id="{7B09BE1A-097B-F76E-BB7A-8ED2B386136A}"/>
               </a:ext>
             </a:extLst>
           </p:cNvPr>
@@ -6563,8 +6563,8 @@
         </p:blipFill>
         <p:spPr>
           <a:xfrm>
-            <a:off x="0" y="666448"/>
-            <a:ext cx="9144000" cy="3953480"/>
+            <a:off x="0" y="662156"/>
+            <a:ext cx="9144000" cy="3962064"/>
           </a:xfrm>
           <a:prstGeom prst="rect">
             <a:avLst/>
@@ -6641,10 +6641,10 @@
       </p:sp>
       <p:pic>
         <p:nvPicPr>
-          <p:cNvPr id="4" name="Imagen 3">
+          <p:cNvPr id="3" name="Imagen 2">
             <a:extLst>
               <a:ext uri="{FF2B5EF4-FFF2-40B4-BE49-F238E27FC236}">
-                <a16:creationId xmlns:a16="http://schemas.microsoft.com/office/drawing/2014/main" id="{9FABD344-BF12-4110-84B5-F4EFB6F70074}"/>
+                <a16:creationId xmlns:a16="http://schemas.microsoft.com/office/drawing/2014/main" id="{185FE8E3-F062-24B1-F9F5-AFDBDA9A9F14}"/>
               </a:ext>
             </a:extLst>
           </p:cNvPr>
@@ -6661,8 +6661,8 @@
         </p:blipFill>
         <p:spPr>
           <a:xfrm>
-            <a:off x="0" y="1165884"/>
-            <a:ext cx="9144000" cy="2954607"/>
+            <a:off x="0" y="1188692"/>
+            <a:ext cx="9144000" cy="2908992"/>
           </a:xfrm>
           <a:prstGeom prst="rect">
             <a:avLst/>
@@ -6745,10 +6745,10 @@
       </p:sp>
       <p:pic>
         <p:nvPicPr>
-          <p:cNvPr id="4" name="Imagen 3">
+          <p:cNvPr id="3" name="Imagen 2">
             <a:extLst>
               <a:ext uri="{FF2B5EF4-FFF2-40B4-BE49-F238E27FC236}">
-                <a16:creationId xmlns:a16="http://schemas.microsoft.com/office/drawing/2014/main" id="{C54193F9-8DFA-A6E5-9877-F6B7DC8586C4}"/>
+                <a16:creationId xmlns:a16="http://schemas.microsoft.com/office/drawing/2014/main" id="{FCB4BE3E-4601-4746-BC1A-C4DC5319617E}"/>
               </a:ext>
             </a:extLst>
           </p:cNvPr>
@@ -6765,8 +6765,8 @@
         </p:blipFill>
         <p:spPr>
           <a:xfrm>
-            <a:off x="0" y="459496"/>
-            <a:ext cx="9144000" cy="4367383"/>
+            <a:off x="0" y="471075"/>
+            <a:ext cx="9144000" cy="4344226"/>
           </a:xfrm>
           <a:prstGeom prst="rect">
             <a:avLst/>
@@ -6843,10 +6843,10 @@
       </p:sp>
       <p:pic>
         <p:nvPicPr>
-          <p:cNvPr id="4" name="Imagen 3">
+          <p:cNvPr id="5" name="Imagen 4">
             <a:extLst>
               <a:ext uri="{FF2B5EF4-FFF2-40B4-BE49-F238E27FC236}">
-                <a16:creationId xmlns:a16="http://schemas.microsoft.com/office/drawing/2014/main" id="{E9453BFF-46CF-7224-D0E2-39FADF4B1B78}"/>
+                <a16:creationId xmlns:a16="http://schemas.microsoft.com/office/drawing/2014/main" id="{D66BF2FA-BD96-CF74-35CF-EE0C2E6543EF}"/>
               </a:ext>
             </a:extLst>
           </p:cNvPr>
@@ -6863,8 +6863,8 @@
         </p:blipFill>
         <p:spPr>
           <a:xfrm>
-            <a:off x="0" y="1084319"/>
-            <a:ext cx="9144000" cy="3117737"/>
+            <a:off x="-6725" y="1037772"/>
+            <a:ext cx="9144000" cy="3210831"/>
           </a:xfrm>
           <a:prstGeom prst="rect">
             <a:avLst/>
@@ -6941,10 +6941,10 @@
       </p:sp>
       <p:pic>
         <p:nvPicPr>
-          <p:cNvPr id="4" name="Imagen 3">
+          <p:cNvPr id="3" name="Imagen 2">
             <a:extLst>
               <a:ext uri="{FF2B5EF4-FFF2-40B4-BE49-F238E27FC236}">
-                <a16:creationId xmlns:a16="http://schemas.microsoft.com/office/drawing/2014/main" id="{AB795206-768E-ADBC-0C06-AB0284E14A75}"/>
+                <a16:creationId xmlns:a16="http://schemas.microsoft.com/office/drawing/2014/main" id="{F37DDB57-3628-8CD0-863D-0A162C3655FB}"/>
               </a:ext>
             </a:extLst>
           </p:cNvPr>
@@ -6961,8 +6961,8 @@
         </p:blipFill>
         <p:spPr>
           <a:xfrm>
-            <a:off x="0" y="510849"/>
-            <a:ext cx="9144000" cy="4409801"/>
+            <a:off x="0" y="462928"/>
+            <a:ext cx="9144000" cy="4360520"/>
           </a:xfrm>
           <a:prstGeom prst="rect">
             <a:avLst/>
@@ -7039,10 +7039,10 @@
       </p:sp>
       <p:pic>
         <p:nvPicPr>
-          <p:cNvPr id="4" name="Imagen 3">
+          <p:cNvPr id="3" name="Imagen 2">
             <a:extLst>
               <a:ext uri="{FF2B5EF4-FFF2-40B4-BE49-F238E27FC236}">
-                <a16:creationId xmlns:a16="http://schemas.microsoft.com/office/drawing/2014/main" id="{F361DA47-C5E9-59BA-B1E5-B60066A8ED30}"/>
+                <a16:creationId xmlns:a16="http://schemas.microsoft.com/office/drawing/2014/main" id="{6744A1E5-17C1-8380-3381-5C557A89261E}"/>
               </a:ext>
             </a:extLst>
           </p:cNvPr>
@@ -7059,8 +7059,8 @@
         </p:blipFill>
         <p:spPr>
           <a:xfrm>
-            <a:off x="2933477" y="0"/>
-            <a:ext cx="3277046" cy="5143500"/>
+            <a:off x="0" y="709644"/>
+            <a:ext cx="9144000" cy="3724212"/>
           </a:xfrm>
           <a:prstGeom prst="rect">
             <a:avLst/>
